--- a/talks/hope-practice.pptx
+++ b/talks/hope-practice.pptx
@@ -1788,6 +1788,59 @@
           <a:chExt cx="0" cy="0"/>
         </a:xfrm>
       </p:grpSpPr>
+      <p:sp>
+        <p:nvSpPr>
+          <p:cNvPr id="3" name="Text 20">
+            <a:extLst>
+              <a:ext uri="{FF2B5EF4-FFF2-40B4-BE49-F238E27FC236}">
+                <a16:creationId xmlns:a16="http://schemas.microsoft.com/office/drawing/2014/main" id="{FE275FCC-6B3F-99FA-B707-5BAE17B78963}"/>
+              </a:ext>
+            </a:extLst>
+          </p:cNvPr>
+          <p:cNvSpPr/>
+          <p:nvPr userDrawn="1"/>
+        </p:nvSpPr>
+        <p:spPr>
+          <a:xfrm>
+            <a:off x="112275" y="4819467"/>
+            <a:ext cx="457200" cy="228600"/>
+          </a:xfrm>
+          <a:prstGeom prst="rect">
+            <a:avLst/>
+          </a:prstGeom>
+          <a:noFill/>
+          <a:ln/>
+        </p:spPr>
+        <p:txBody>
+          <a:bodyPr wrap="square" rtlCol="0" anchor="ctr"/>
+          <a:lstStyle/>
+          <a:p>
+            <a:pPr marL="0" indent="0" algn="r">
+              <a:buNone/>
+            </a:pPr>
+            <a:fld id="{159A875D-41CE-5A4F-83AB-D336C7F16FE3}" type="slidenum">
+              <a:rPr lang="en-US" sz="1050" b="1" smtClean="0">
+                <a:solidFill>
+                  <a:srgbClr val="FFFFFF">
+                    <a:alpha val="50000"/>
+                  </a:srgbClr>
+                </a:solidFill>
+                <a:latin typeface="Avenir" pitchFamily="34" charset="0"/>
+                <a:ea typeface="Avenir" pitchFamily="34" charset="-122"/>
+                <a:cs typeface="Avenir" pitchFamily="34" charset="-120"/>
+              </a:rPr>
+              <a:t>‹#›</a:t>
+            </a:fld>
+            <a:endParaRPr lang="en-US" sz="900" b="1" dirty="0">
+              <a:solidFill>
+                <a:srgbClr val="FF0000">
+                  <a:alpha val="50000"/>
+                </a:srgbClr>
+              </a:solidFill>
+            </a:endParaRPr>
+          </a:p>
+        </p:txBody>
+      </p:sp>
     </p:spTree>
   </p:cSld>
   <p:clrMapOvr>
@@ -2197,45 +2250,6 @@
       </p:sp>
       <p:sp>
         <p:nvSpPr>
-          <p:cNvPr id="5" name="Text 2"/>
-          <p:cNvSpPr/>
-          <p:nvPr/>
-        </p:nvSpPr>
-        <p:spPr>
-          <a:xfrm>
-            <a:off x="457200" y="502920"/>
-            <a:ext cx="7315200" cy="274320"/>
-          </a:xfrm>
-          <a:prstGeom prst="rect">
-            <a:avLst/>
-          </a:prstGeom>
-          <a:noFill/>
-          <a:ln/>
-        </p:spPr>
-        <p:txBody>
-          <a:bodyPr wrap="square" lIns="0" tIns="0" rIns="0" bIns="0" rtlCol="0" anchor="ctr"/>
-          <a:lstStyle/>
-          <a:p>
-            <a:pPr marL="0" indent="0">
-              <a:buNone/>
-            </a:pPr>
-            <a:r>
-              <a:rPr lang="en-US" sz="1000" b="1" kern="0" spc="300" dirty="0">
-                <a:solidFill>
-                  <a:srgbClr val="C9A84C"/>
-                </a:solidFill>
-                <a:latin typeface="Avenir" pitchFamily="34" charset="0"/>
-                <a:ea typeface="Avenir" pitchFamily="34" charset="-122"/>
-                <a:cs typeface="Avenir" pitchFamily="34" charset="-120"/>
-              </a:rPr>
-              <a:t>AGILE BEST SELF  ·  HOPE SERIES</a:t>
-            </a:r>
-            <a:endParaRPr lang="en-US" sz="1000" dirty="0"/>
-          </a:p>
-        </p:txBody>
-      </p:sp>
-      <p:sp>
-        <p:nvSpPr>
           <p:cNvPr id="6" name="Text 3"/>
           <p:cNvSpPr/>
           <p:nvPr/>
@@ -2298,52 +2312,13 @@
       </p:sp>
       <p:sp>
         <p:nvSpPr>
-          <p:cNvPr id="7" name="Text 4"/>
-          <p:cNvSpPr/>
-          <p:nvPr/>
-        </p:nvSpPr>
-        <p:spPr>
-          <a:xfrm>
-            <a:off x="457200" y="4297680"/>
-            <a:ext cx="5486400" cy="320040"/>
-          </a:xfrm>
-          <a:prstGeom prst="rect">
-            <a:avLst/>
-          </a:prstGeom>
-          <a:noFill/>
-          <a:ln/>
-        </p:spPr>
-        <p:txBody>
-          <a:bodyPr wrap="square" lIns="0" tIns="0" rIns="0" bIns="0" rtlCol="0" anchor="ctr"/>
-          <a:lstStyle/>
-          <a:p>
-            <a:pPr marL="0" indent="0">
-              <a:buNone/>
-            </a:pPr>
-            <a:r>
-              <a:rPr lang="en-US" sz="1100" dirty="0">
-                <a:solidFill>
-                  <a:srgbClr val="C9A84C"/>
-                </a:solidFill>
-                <a:latin typeface="Avenir" pitchFamily="34" charset="0"/>
-                <a:ea typeface="Avenir" pitchFamily="34" charset="-122"/>
-                <a:cs typeface="Avenir" pitchFamily="34" charset="-120"/>
-              </a:rPr>
-              <a:t>Brian Hackerson  |  Co-Creator, Agile Best Self</a:t>
-            </a:r>
-            <a:endParaRPr lang="en-US" sz="1100" dirty="0"/>
-          </a:p>
-        </p:txBody>
-      </p:sp>
-      <p:sp>
-        <p:nvSpPr>
           <p:cNvPr id="8" name="Text 5"/>
           <p:cNvSpPr/>
           <p:nvPr/>
         </p:nvSpPr>
         <p:spPr>
           <a:xfrm>
-            <a:off x="457200" y="4846320"/>
+            <a:off x="4213654" y="4780026"/>
             <a:ext cx="2743200" cy="201168"/>
           </a:xfrm>
           <a:prstGeom prst="rect">
@@ -2373,6 +2348,51 @@
               <a:t>Photo: StockCake</a:t>
             </a:r>
             <a:endParaRPr lang="en-US" sz="700" dirty="0"/>
+          </a:p>
+        </p:txBody>
+      </p:sp>
+      <p:sp>
+        <p:nvSpPr>
+          <p:cNvPr id="9" name="Text 4">
+            <a:extLst>
+              <a:ext uri="{FF2B5EF4-FFF2-40B4-BE49-F238E27FC236}">
+                <a16:creationId xmlns:a16="http://schemas.microsoft.com/office/drawing/2014/main" id="{85DF2D57-FEE5-4508-71F3-7C81FD10FA9B}"/>
+              </a:ext>
+            </a:extLst>
+          </p:cNvPr>
+          <p:cNvSpPr/>
+          <p:nvPr/>
+        </p:nvSpPr>
+        <p:spPr>
+          <a:xfrm>
+            <a:off x="457200" y="3272069"/>
+            <a:ext cx="5486400" cy="320040"/>
+          </a:xfrm>
+          <a:prstGeom prst="rect">
+            <a:avLst/>
+          </a:prstGeom>
+          <a:noFill/>
+          <a:ln/>
+        </p:spPr>
+        <p:txBody>
+          <a:bodyPr wrap="square" lIns="0" tIns="0" rIns="0" bIns="0" rtlCol="0" anchor="ctr"/>
+          <a:lstStyle/>
+          <a:p>
+            <a:pPr marL="0" indent="0">
+              <a:buNone/>
+            </a:pPr>
+            <a:r>
+              <a:rPr lang="en-US" sz="1600" dirty="0">
+                <a:solidFill>
+                  <a:srgbClr val="C9A84C"/>
+                </a:solidFill>
+                <a:latin typeface="Avenir" pitchFamily="34" charset="0"/>
+                <a:ea typeface="Avenir" pitchFamily="34" charset="-122"/>
+                <a:cs typeface="Avenir" pitchFamily="34" charset="-120"/>
+              </a:rPr>
+              <a:t>Brian Hackerson</a:t>
+            </a:r>
+            <a:endParaRPr lang="en-US" sz="1600" dirty="0"/>
           </a:p>
         </p:txBody>
       </p:sp>
@@ -2496,7 +2516,7 @@
               <a:buNone/>
             </a:pPr>
             <a:r>
-              <a:rPr lang="en-US" sz="900" dirty="0">
+              <a:rPr lang="en-US" sz="900" dirty="0" err="1">
                 <a:solidFill>
                   <a:srgbClr val="FFFFFF">
                     <a:alpha val="50000"/>
@@ -2506,48 +2526,7 @@
                 <a:ea typeface="Avenir" pitchFamily="34" charset="-122"/>
                 <a:cs typeface="Avenir" pitchFamily="34" charset="-120"/>
               </a:rPr>
-              <a:t>agilebestself.com</a:t>
-            </a:r>
-            <a:endParaRPr lang="en-US" sz="900" dirty="0"/>
-          </a:p>
-        </p:txBody>
-      </p:sp>
-      <p:sp>
-        <p:nvSpPr>
-          <p:cNvPr id="4" name="Text 2"/>
-          <p:cNvSpPr/>
-          <p:nvPr/>
-        </p:nvSpPr>
-        <p:spPr>
-          <a:xfrm>
-            <a:off x="8503920" y="4773168"/>
-            <a:ext cx="457200" cy="228600"/>
-          </a:xfrm>
-          <a:prstGeom prst="rect">
-            <a:avLst/>
-          </a:prstGeom>
-          <a:noFill/>
-          <a:ln/>
-        </p:spPr>
-        <p:txBody>
-          <a:bodyPr wrap="square" rtlCol="0" anchor="ctr"/>
-          <a:lstStyle/>
-          <a:p>
-            <a:pPr marL="0" indent="0" algn="r">
-              <a:buNone/>
-            </a:pPr>
-            <a:r>
-              <a:rPr lang="en-US" sz="900" dirty="0">
-                <a:solidFill>
-                  <a:srgbClr val="FFFFFF">
-                    <a:alpha val="50000"/>
-                  </a:srgbClr>
-                </a:solidFill>
-                <a:latin typeface="Avenir" pitchFamily="34" charset="0"/>
-                <a:ea typeface="Avenir" pitchFamily="34" charset="-122"/>
-                <a:cs typeface="Avenir" pitchFamily="34" charset="-120"/>
-              </a:rPr>
-              <a:t>10</a:t>
+              <a:t>hopeisnotafeeling.com</a:t>
             </a:r>
             <a:endParaRPr lang="en-US" sz="900" dirty="0"/>
           </a:p>
@@ -3469,7 +3448,7 @@
         <p:spPr>
           <a:xfrm>
             <a:off x="320040" y="4773168"/>
-            <a:ext cx="8503920" cy="228600"/>
+            <a:ext cx="8275320" cy="228600"/>
           </a:xfrm>
           <a:prstGeom prst="rect">
             <a:avLst/>
@@ -3481,11 +3460,11 @@
           <a:bodyPr wrap="square" rtlCol="0" anchor="ctr"/>
           <a:lstStyle/>
           <a:p>
-            <a:pPr marL="0" indent="0" algn="r">
-              <a:buNone/>
-            </a:pPr>
-            <a:r>
-              <a:rPr lang="en-US" sz="900" dirty="0">
+            <a:pPr marL="0" indent="0">
+              <a:buNone/>
+            </a:pPr>
+            <a:r>
+              <a:rPr lang="en-US" sz="900" dirty="0" err="1">
                 <a:solidFill>
                   <a:srgbClr val="4A5568"/>
                 </a:solidFill>
@@ -3493,7 +3472,7 @@
                 <a:ea typeface="Avenir" pitchFamily="34" charset="-122"/>
                 <a:cs typeface="Avenir" pitchFamily="34" charset="-120"/>
               </a:rPr>
-              <a:t>agilebestself.com</a:t>
+              <a:t>hopeisnotafeeling.com</a:t>
             </a:r>
             <a:endParaRPr lang="en-US" sz="900" dirty="0"/>
           </a:p>
@@ -4313,7 +4292,7 @@
               <a:buNone/>
             </a:pPr>
             <a:r>
-              <a:rPr lang="en-US" sz="900" dirty="0">
+              <a:rPr lang="en-US" sz="900" dirty="0" err="1">
                 <a:solidFill>
                   <a:srgbClr val="FFFFFF">
                     <a:alpha val="50000"/>
@@ -4323,48 +4302,7 @@
                 <a:ea typeface="Avenir" pitchFamily="34" charset="-122"/>
                 <a:cs typeface="Avenir" pitchFamily="34" charset="-120"/>
               </a:rPr>
-              <a:t>agilebestself.com</a:t>
-            </a:r>
-            <a:endParaRPr lang="en-US" sz="900" dirty="0"/>
-          </a:p>
-        </p:txBody>
-      </p:sp>
-      <p:sp>
-        <p:nvSpPr>
-          <p:cNvPr id="22" name="Text 20"/>
-          <p:cNvSpPr/>
-          <p:nvPr/>
-        </p:nvSpPr>
-        <p:spPr>
-          <a:xfrm>
-            <a:off x="8503920" y="4773168"/>
-            <a:ext cx="457200" cy="228600"/>
-          </a:xfrm>
-          <a:prstGeom prst="rect">
-            <a:avLst/>
-          </a:prstGeom>
-          <a:noFill/>
-          <a:ln/>
-        </p:spPr>
-        <p:txBody>
-          <a:bodyPr wrap="square" rtlCol="0" anchor="ctr"/>
-          <a:lstStyle/>
-          <a:p>
-            <a:pPr marL="0" indent="0" algn="r">
-              <a:buNone/>
-            </a:pPr>
-            <a:r>
-              <a:rPr lang="en-US" sz="900" dirty="0">
-                <a:solidFill>
-                  <a:srgbClr val="FFFFFF">
-                    <a:alpha val="50000"/>
-                  </a:srgbClr>
-                </a:solidFill>
-                <a:latin typeface="Avenir" pitchFamily="34" charset="0"/>
-                <a:ea typeface="Avenir" pitchFamily="34" charset="-122"/>
-                <a:cs typeface="Avenir" pitchFamily="34" charset="-120"/>
-              </a:rPr>
-              <a:t>12</a:t>
+              <a:t>hopeisnotafeeling.com</a:t>
             </a:r>
             <a:endParaRPr lang="en-US" sz="900" dirty="0"/>
           </a:p>
@@ -5398,11 +5336,11 @@
           <a:bodyPr wrap="square" rtlCol="0" anchor="ctr"/>
           <a:lstStyle/>
           <a:p>
-            <a:pPr marL="0" indent="0" algn="r">
-              <a:buNone/>
-            </a:pPr>
-            <a:r>
-              <a:rPr lang="en-US" sz="900" dirty="0">
+            <a:pPr marL="0" indent="0">
+              <a:buNone/>
+            </a:pPr>
+            <a:r>
+              <a:rPr lang="en-US" sz="900" dirty="0" err="1">
                 <a:solidFill>
                   <a:srgbClr val="4A5568"/>
                 </a:solidFill>
@@ -5410,7 +5348,7 @@
                 <a:ea typeface="Avenir" pitchFamily="34" charset="-122"/>
                 <a:cs typeface="Avenir" pitchFamily="34" charset="-120"/>
               </a:rPr>
-              <a:t>agilebestself.com</a:t>
+              <a:t>hopeisnotafeeling.com</a:t>
             </a:r>
             <a:endParaRPr lang="en-US" sz="900" dirty="0"/>
           </a:p>
@@ -6472,11 +6410,11 @@
           <a:bodyPr wrap="square" rtlCol="0" anchor="ctr"/>
           <a:lstStyle/>
           <a:p>
-            <a:pPr marL="0" indent="0" algn="r">
-              <a:buNone/>
-            </a:pPr>
-            <a:r>
-              <a:rPr lang="en-US" sz="900" dirty="0">
+            <a:pPr marL="0" indent="0">
+              <a:buNone/>
+            </a:pPr>
+            <a:r>
+              <a:rPr lang="en-US" sz="900" dirty="0" err="1">
                 <a:solidFill>
                   <a:srgbClr val="4A5568"/>
                 </a:solidFill>
@@ -6484,7 +6422,7 @@
                 <a:ea typeface="Avenir" pitchFamily="34" charset="-122"/>
                 <a:cs typeface="Avenir" pitchFamily="34" charset="-120"/>
               </a:rPr>
-              <a:t>agilebestself.com</a:t>
+              <a:t>hopeisnotafeeling.com</a:t>
             </a:r>
             <a:endParaRPr lang="en-US" sz="900" dirty="0"/>
           </a:p>
@@ -7207,7 +7145,7 @@
               <a:buNone/>
             </a:pPr>
             <a:r>
-              <a:rPr lang="en-US" sz="900" dirty="0">
+              <a:rPr lang="en-US" sz="900" dirty="0" err="1">
                 <a:solidFill>
                   <a:srgbClr val="FFFFFF">
                     <a:alpha val="50000"/>
@@ -7217,48 +7155,7 @@
                 <a:ea typeface="Avenir" pitchFamily="34" charset="-122"/>
                 <a:cs typeface="Avenir" pitchFamily="34" charset="-120"/>
               </a:rPr>
-              <a:t>agilebestself.com</a:t>
-            </a:r>
-            <a:endParaRPr lang="en-US" sz="900" dirty="0"/>
-          </a:p>
-        </p:txBody>
-      </p:sp>
-      <p:sp>
-        <p:nvSpPr>
-          <p:cNvPr id="10" name="Text 8"/>
-          <p:cNvSpPr/>
-          <p:nvPr/>
-        </p:nvSpPr>
-        <p:spPr>
-          <a:xfrm>
-            <a:off x="8503920" y="4773168"/>
-            <a:ext cx="457200" cy="228600"/>
-          </a:xfrm>
-          <a:prstGeom prst="rect">
-            <a:avLst/>
-          </a:prstGeom>
-          <a:noFill/>
-          <a:ln/>
-        </p:spPr>
-        <p:txBody>
-          <a:bodyPr wrap="square" rtlCol="0" anchor="ctr"/>
-          <a:lstStyle/>
-          <a:p>
-            <a:pPr marL="0" indent="0" algn="r">
-              <a:buNone/>
-            </a:pPr>
-            <a:r>
-              <a:rPr lang="en-US" sz="900" dirty="0">
-                <a:solidFill>
-                  <a:srgbClr val="FFFFFF">
-                    <a:alpha val="50000"/>
-                  </a:srgbClr>
-                </a:solidFill>
-                <a:latin typeface="Avenir" pitchFamily="34" charset="0"/>
-                <a:ea typeface="Avenir" pitchFamily="34" charset="-122"/>
-                <a:cs typeface="Avenir" pitchFamily="34" charset="-120"/>
-              </a:rPr>
-              <a:t>15</a:t>
+              <a:t>hopeisnotafeeling.com</a:t>
             </a:r>
             <a:endParaRPr lang="en-US" sz="900" dirty="0"/>
           </a:p>
@@ -8249,7 +8146,7 @@
               <a:buNone/>
             </a:pPr>
             <a:r>
-              <a:rPr lang="en-US" sz="900" dirty="0">
+              <a:rPr lang="en-US" sz="900" dirty="0" err="1">
                 <a:solidFill>
                   <a:srgbClr val="FFFFFF">
                     <a:alpha val="50000"/>
@@ -8259,48 +8156,7 @@
                 <a:ea typeface="Avenir" pitchFamily="34" charset="-122"/>
                 <a:cs typeface="Avenir" pitchFamily="34" charset="-120"/>
               </a:rPr>
-              <a:t>agilebestself.com</a:t>
-            </a:r>
-            <a:endParaRPr lang="en-US" sz="900" dirty="0"/>
-          </a:p>
-        </p:txBody>
-      </p:sp>
-      <p:sp>
-        <p:nvSpPr>
-          <p:cNvPr id="22" name="Text 20"/>
-          <p:cNvSpPr/>
-          <p:nvPr/>
-        </p:nvSpPr>
-        <p:spPr>
-          <a:xfrm>
-            <a:off x="8503920" y="4773168"/>
-            <a:ext cx="457200" cy="228600"/>
-          </a:xfrm>
-          <a:prstGeom prst="rect">
-            <a:avLst/>
-          </a:prstGeom>
-          <a:noFill/>
-          <a:ln/>
-        </p:spPr>
-        <p:txBody>
-          <a:bodyPr wrap="square" rtlCol="0" anchor="ctr"/>
-          <a:lstStyle/>
-          <a:p>
-            <a:pPr marL="0" indent="0" algn="r">
-              <a:buNone/>
-            </a:pPr>
-            <a:r>
-              <a:rPr lang="en-US" sz="900" dirty="0">
-                <a:solidFill>
-                  <a:srgbClr val="FFFFFF">
-                    <a:alpha val="50000"/>
-                  </a:srgbClr>
-                </a:solidFill>
-                <a:latin typeface="Avenir" pitchFamily="34" charset="0"/>
-                <a:ea typeface="Avenir" pitchFamily="34" charset="-122"/>
-                <a:cs typeface="Avenir" pitchFamily="34" charset="-120"/>
-              </a:rPr>
-              <a:t>16</a:t>
+              <a:t>hopeisnotafeeling.com</a:t>
             </a:r>
             <a:endParaRPr lang="en-US" sz="900" dirty="0"/>
           </a:p>
@@ -8930,7 +8786,7 @@
               <a:buNone/>
             </a:pPr>
             <a:r>
-              <a:rPr lang="en-US" sz="900" dirty="0">
+              <a:rPr lang="en-US" sz="900" dirty="0" err="1">
                 <a:solidFill>
                   <a:srgbClr val="FFFFFF">
                     <a:alpha val="50000"/>
@@ -8940,48 +8796,7 @@
                 <a:ea typeface="Avenir" pitchFamily="34" charset="-122"/>
                 <a:cs typeface="Avenir" pitchFamily="34" charset="-120"/>
               </a:rPr>
-              <a:t>agilebestself.com</a:t>
-            </a:r>
-            <a:endParaRPr lang="en-US" sz="900" dirty="0"/>
-          </a:p>
-        </p:txBody>
-      </p:sp>
-      <p:sp>
-        <p:nvSpPr>
-          <p:cNvPr id="18" name="Text 16"/>
-          <p:cNvSpPr/>
-          <p:nvPr/>
-        </p:nvSpPr>
-        <p:spPr>
-          <a:xfrm>
-            <a:off x="8503920" y="4773168"/>
-            <a:ext cx="457200" cy="228600"/>
-          </a:xfrm>
-          <a:prstGeom prst="rect">
-            <a:avLst/>
-          </a:prstGeom>
-          <a:noFill/>
-          <a:ln/>
-        </p:spPr>
-        <p:txBody>
-          <a:bodyPr wrap="square" rtlCol="0" anchor="ctr"/>
-          <a:lstStyle/>
-          <a:p>
-            <a:pPr marL="0" indent="0" algn="r">
-              <a:buNone/>
-            </a:pPr>
-            <a:r>
-              <a:rPr lang="en-US" sz="900" dirty="0">
-                <a:solidFill>
-                  <a:srgbClr val="FFFFFF">
-                    <a:alpha val="50000"/>
-                  </a:srgbClr>
-                </a:solidFill>
-                <a:latin typeface="Avenir" pitchFamily="34" charset="0"/>
-                <a:ea typeface="Avenir" pitchFamily="34" charset="-122"/>
-                <a:cs typeface="Avenir" pitchFamily="34" charset="-120"/>
-              </a:rPr>
-              <a:t>17</a:t>
+              <a:t>hopeisnotafeeling.com</a:t>
             </a:r>
             <a:endParaRPr lang="en-US" sz="900" dirty="0"/>
           </a:p>
@@ -9181,6 +8996,17 @@
               <a:t>Connect  </a:t>
             </a:r>
             <a:r>
+              <a:rPr lang="en-US" sz="1300" dirty="0" err="1">
+                <a:solidFill>
+                  <a:srgbClr val="C9A84C"/>
+                </a:solidFill>
+                <a:latin typeface="Avenir" pitchFamily="34" charset="0"/>
+                <a:ea typeface="Avenir" pitchFamily="34" charset="-122"/>
+                <a:cs typeface="Avenir" pitchFamily="34" charset="-120"/>
+              </a:rPr>
+              <a:t>hopeisnotafeeling.com</a:t>
+            </a:r>
+            <a:r>
               <a:rPr lang="en-US" sz="1300" dirty="0">
                 <a:solidFill>
                   <a:srgbClr val="C9A84C"/>
@@ -9189,7 +9015,7 @@
                 <a:ea typeface="Avenir" pitchFamily="34" charset="-122"/>
                 <a:cs typeface="Avenir" pitchFamily="34" charset="-120"/>
               </a:rPr>
-              <a:t>agilebestself.com  |  LinkedIn: Brian Hackerson</a:t>
+              <a:t>  |  LinkedIn: Brian Hackerson</a:t>
             </a:r>
             <a:endParaRPr lang="en-US" sz="1300" dirty="0"/>
           </a:p>
@@ -9224,47 +9050,6 @@
           <a:lstStyle/>
           <a:p>
             <a:endParaRPr lang="en-US"/>
-          </a:p>
-        </p:txBody>
-      </p:sp>
-      <p:sp>
-        <p:nvSpPr>
-          <p:cNvPr id="10" name="Text 8"/>
-          <p:cNvSpPr/>
-          <p:nvPr/>
-        </p:nvSpPr>
-        <p:spPr>
-          <a:xfrm>
-            <a:off x="8503920" y="4773168"/>
-            <a:ext cx="457200" cy="228600"/>
-          </a:xfrm>
-          <a:prstGeom prst="rect">
-            <a:avLst/>
-          </a:prstGeom>
-          <a:noFill/>
-          <a:ln/>
-        </p:spPr>
-        <p:txBody>
-          <a:bodyPr wrap="square" rtlCol="0" anchor="ctr"/>
-          <a:lstStyle/>
-          <a:p>
-            <a:pPr marL="0" indent="0" algn="r">
-              <a:buNone/>
-            </a:pPr>
-            <a:r>
-              <a:rPr lang="en-US" sz="900" dirty="0">
-                <a:solidFill>
-                  <a:srgbClr val="FFFFFF">
-                    <a:alpha val="50000"/>
-                  </a:srgbClr>
-                </a:solidFill>
-                <a:latin typeface="Avenir" pitchFamily="34" charset="0"/>
-                <a:ea typeface="Avenir" pitchFamily="34" charset="-122"/>
-                <a:cs typeface="Avenir" pitchFamily="34" charset="-120"/>
-              </a:rPr>
-              <a:t>18</a:t>
-            </a:r>
-            <a:endParaRPr lang="en-US" sz="900" dirty="0"/>
           </a:p>
         </p:txBody>
       </p:sp>
@@ -9470,47 +9255,6 @@
           </a:p>
         </p:txBody>
       </p:sp>
-      <p:sp>
-        <p:nvSpPr>
-          <p:cNvPr id="6" name="Text 4"/>
-          <p:cNvSpPr/>
-          <p:nvPr/>
-        </p:nvSpPr>
-        <p:spPr>
-          <a:xfrm>
-            <a:off x="8503920" y="4773168"/>
-            <a:ext cx="457200" cy="228600"/>
-          </a:xfrm>
-          <a:prstGeom prst="rect">
-            <a:avLst/>
-          </a:prstGeom>
-          <a:noFill/>
-          <a:ln/>
-        </p:spPr>
-        <p:txBody>
-          <a:bodyPr wrap="square" rtlCol="0" anchor="ctr"/>
-          <a:lstStyle/>
-          <a:p>
-            <a:pPr marL="0" indent="0" algn="r">
-              <a:buNone/>
-            </a:pPr>
-            <a:r>
-              <a:rPr lang="en-US" sz="900" dirty="0">
-                <a:solidFill>
-                  <a:srgbClr val="FFFFFF">
-                    <a:alpha val="50000"/>
-                  </a:srgbClr>
-                </a:solidFill>
-                <a:latin typeface="Avenir" pitchFamily="34" charset="0"/>
-                <a:ea typeface="Avenir" pitchFamily="34" charset="-122"/>
-                <a:cs typeface="Avenir" pitchFamily="34" charset="-120"/>
-              </a:rPr>
-              <a:t>2</a:t>
-            </a:r>
-            <a:endParaRPr lang="en-US" sz="900" dirty="0"/>
-          </a:p>
-        </p:txBody>
-      </p:sp>
     </p:spTree>
   </p:cSld>
   <p:clrMapOvr>
@@ -9619,47 +9363,6 @@
           </a:p>
         </p:txBody>
       </p:sp>
-      <p:sp>
-        <p:nvSpPr>
-          <p:cNvPr id="4" name="Text 2"/>
-          <p:cNvSpPr/>
-          <p:nvPr/>
-        </p:nvSpPr>
-        <p:spPr>
-          <a:xfrm>
-            <a:off x="8503920" y="4773168"/>
-            <a:ext cx="457200" cy="228600"/>
-          </a:xfrm>
-          <a:prstGeom prst="rect">
-            <a:avLst/>
-          </a:prstGeom>
-          <a:noFill/>
-          <a:ln/>
-        </p:spPr>
-        <p:txBody>
-          <a:bodyPr wrap="square" rtlCol="0" anchor="ctr"/>
-          <a:lstStyle/>
-          <a:p>
-            <a:pPr marL="0" indent="0" algn="r">
-              <a:buNone/>
-            </a:pPr>
-            <a:r>
-              <a:rPr lang="en-US" sz="900" dirty="0">
-                <a:solidFill>
-                  <a:srgbClr val="FFFFFF">
-                    <a:alpha val="50000"/>
-                  </a:srgbClr>
-                </a:solidFill>
-                <a:latin typeface="Avenir" pitchFamily="34" charset="0"/>
-                <a:ea typeface="Avenir" pitchFamily="34" charset="-122"/>
-                <a:cs typeface="Avenir" pitchFamily="34" charset="-120"/>
-              </a:rPr>
-              <a:t>3</a:t>
-            </a:r>
-            <a:endParaRPr lang="en-US" sz="900" dirty="0"/>
-          </a:p>
-        </p:txBody>
-      </p:sp>
     </p:spTree>
   </p:cSld>
   <p:clrMapOvr>
@@ -9930,7 +9633,7 @@
               <a:buNone/>
             </a:pPr>
             <a:r>
-              <a:rPr lang="en-US" sz="900" dirty="0">
+              <a:rPr lang="en-US" sz="900" dirty="0" err="1">
                 <a:solidFill>
                   <a:srgbClr val="FFFFFF">
                     <a:alpha val="50000"/>
@@ -9940,48 +9643,7 @@
                 <a:ea typeface="Avenir" pitchFamily="34" charset="-122"/>
                 <a:cs typeface="Avenir" pitchFamily="34" charset="-120"/>
               </a:rPr>
-              <a:t>agilebestself.com</a:t>
-            </a:r>
-            <a:endParaRPr lang="en-US" sz="900" dirty="0"/>
-          </a:p>
-        </p:txBody>
-      </p:sp>
-      <p:sp>
-        <p:nvSpPr>
-          <p:cNvPr id="7" name="Text 5"/>
-          <p:cNvSpPr/>
-          <p:nvPr/>
-        </p:nvSpPr>
-        <p:spPr>
-          <a:xfrm>
-            <a:off x="8503920" y="4773168"/>
-            <a:ext cx="457200" cy="228600"/>
-          </a:xfrm>
-          <a:prstGeom prst="rect">
-            <a:avLst/>
-          </a:prstGeom>
-          <a:noFill/>
-          <a:ln/>
-        </p:spPr>
-        <p:txBody>
-          <a:bodyPr wrap="square" rtlCol="0" anchor="ctr"/>
-          <a:lstStyle/>
-          <a:p>
-            <a:pPr marL="0" indent="0" algn="r">
-              <a:buNone/>
-            </a:pPr>
-            <a:r>
-              <a:rPr lang="en-US" sz="900" dirty="0">
-                <a:solidFill>
-                  <a:srgbClr val="FFFFFF">
-                    <a:alpha val="50000"/>
-                  </a:srgbClr>
-                </a:solidFill>
-                <a:latin typeface="Avenir" pitchFamily="34" charset="0"/>
-                <a:ea typeface="Avenir" pitchFamily="34" charset="-122"/>
-                <a:cs typeface="Avenir" pitchFamily="34" charset="-120"/>
-              </a:rPr>
-              <a:t>4</a:t>
+              <a:t>hopeisnotafeeling.com</a:t>
             </a:r>
             <a:endParaRPr lang="en-US" sz="900" dirty="0"/>
           </a:p>
@@ -10120,7 +9782,7 @@
                 <a:ea typeface="Avenir" pitchFamily="34" charset="-122"/>
                 <a:cs typeface="Avenir" pitchFamily="34" charset="-120"/>
               </a:rPr>
-              <a:t>What we think</a:t>
+              <a:t>What I thought</a:t>
             </a:r>
             <a:endParaRPr lang="en-US" sz="2200" dirty="0"/>
           </a:p>
@@ -10140,7 +9802,7 @@
                 <a:ea typeface="Avenir" pitchFamily="34" charset="-122"/>
                 <a:cs typeface="Avenir" pitchFamily="34" charset="-120"/>
               </a:rPr>
-              <a:t>hope is:</a:t>
+              <a:t>hope was:</a:t>
             </a:r>
             <a:endParaRPr lang="en-US" sz="2200" dirty="0"/>
           </a:p>
@@ -10510,7 +10172,7 @@
         <p:spPr>
           <a:xfrm>
             <a:off x="320040" y="4773168"/>
-            <a:ext cx="8503920" cy="228600"/>
+            <a:ext cx="1485611" cy="228600"/>
           </a:xfrm>
           <a:prstGeom prst="rect">
             <a:avLst/>
@@ -10522,21 +10184,25 @@
           <a:bodyPr wrap="square" rtlCol="0" anchor="ctr"/>
           <a:lstStyle/>
           <a:p>
-            <a:pPr marL="0" indent="0" algn="r">
-              <a:buNone/>
-            </a:pPr>
-            <a:r>
-              <a:rPr lang="en-US" sz="900" dirty="0">
-                <a:solidFill>
-                  <a:srgbClr val="4A5568"/>
-                </a:solidFill>
-                <a:latin typeface="Avenir" pitchFamily="34" charset="0"/>
-                <a:ea typeface="Avenir" pitchFamily="34" charset="-122"/>
-                <a:cs typeface="Avenir" pitchFamily="34" charset="-120"/>
-              </a:rPr>
-              <a:t>agilebestself.com</a:t>
-            </a:r>
-            <a:endParaRPr lang="en-US" sz="900" dirty="0"/>
+            <a:pPr marL="0" indent="0">
+              <a:buNone/>
+            </a:pPr>
+            <a:r>
+              <a:rPr lang="en-US" sz="900" dirty="0" err="1">
+                <a:solidFill>
+                  <a:schemeClr val="bg1"/>
+                </a:solidFill>
+                <a:latin typeface="Avenir" pitchFamily="34" charset="0"/>
+                <a:ea typeface="Avenir" pitchFamily="34" charset="-122"/>
+                <a:cs typeface="Avenir" pitchFamily="34" charset="-120"/>
+              </a:rPr>
+              <a:t>hopeisnotafeeling.com</a:t>
+            </a:r>
+            <a:endParaRPr lang="en-US" sz="900" dirty="0">
+              <a:solidFill>
+                <a:schemeClr val="bg1"/>
+              </a:solidFill>
+            </a:endParaRPr>
           </a:p>
         </p:txBody>
       </p:sp>
@@ -11355,11 +11021,11 @@
           <a:bodyPr wrap="square" rtlCol="0" anchor="ctr"/>
           <a:lstStyle/>
           <a:p>
-            <a:pPr marL="0" indent="0" algn="r">
-              <a:buNone/>
-            </a:pPr>
-            <a:r>
-              <a:rPr lang="en-US" sz="900" dirty="0">
+            <a:pPr marL="0" indent="0">
+              <a:buNone/>
+            </a:pPr>
+            <a:r>
+              <a:rPr lang="en-US" sz="900" dirty="0" err="1">
                 <a:solidFill>
                   <a:srgbClr val="4A5568"/>
                 </a:solidFill>
@@ -11367,7 +11033,7 @@
                 <a:ea typeface="Avenir" pitchFamily="34" charset="-122"/>
                 <a:cs typeface="Avenir" pitchFamily="34" charset="-120"/>
               </a:rPr>
-              <a:t>agilebestself.com</a:t>
+              <a:t>hopeisnotafeeling.com</a:t>
             </a:r>
             <a:endParaRPr lang="en-US" sz="900" dirty="0"/>
           </a:p>
@@ -11785,7 +11451,7 @@
         <p:spPr>
           <a:xfrm>
             <a:off x="4892040" y="2834640"/>
-            <a:ext cx="3383280" cy="1508760"/>
+            <a:ext cx="3429000" cy="1508760"/>
           </a:xfrm>
           <a:prstGeom prst="rect">
             <a:avLst/>
@@ -11853,7 +11519,7 @@
                 <a:ea typeface="Avenir" pitchFamily="34" charset="-122"/>
                 <a:cs typeface="Avenir" pitchFamily="34" charset="-120"/>
               </a:rPr>
-              <a:t>and pathways. Fires at 5am when</a:t>
+              <a:t>and pathways. Fires at 5 am when</a:t>
             </a:r>
             <a:endParaRPr lang="en-US" sz="1100" dirty="0"/>
           </a:p>
@@ -11904,7 +11570,7 @@
               <a:buNone/>
             </a:pPr>
             <a:r>
-              <a:rPr lang="en-US" sz="900" dirty="0">
+              <a:rPr lang="en-US" sz="900" dirty="0" err="1">
                 <a:solidFill>
                   <a:srgbClr val="FFFFFF">
                     <a:alpha val="50000"/>
@@ -11914,48 +11580,7 @@
                 <a:ea typeface="Avenir" pitchFamily="34" charset="-122"/>
                 <a:cs typeface="Avenir" pitchFamily="34" charset="-120"/>
               </a:rPr>
-              <a:t>agilebestself.com</a:t>
-            </a:r>
-            <a:endParaRPr lang="en-US" sz="900" dirty="0"/>
-          </a:p>
-        </p:txBody>
-      </p:sp>
-      <p:sp>
-        <p:nvSpPr>
-          <p:cNvPr id="11" name="Text 9"/>
-          <p:cNvSpPr/>
-          <p:nvPr/>
-        </p:nvSpPr>
-        <p:spPr>
-          <a:xfrm>
-            <a:off x="8503920" y="4773168"/>
-            <a:ext cx="457200" cy="228600"/>
-          </a:xfrm>
-          <a:prstGeom prst="rect">
-            <a:avLst/>
-          </a:prstGeom>
-          <a:noFill/>
-          <a:ln/>
-        </p:spPr>
-        <p:txBody>
-          <a:bodyPr wrap="square" rtlCol="0" anchor="ctr"/>
-          <a:lstStyle/>
-          <a:p>
-            <a:pPr marL="0" indent="0" algn="r">
-              <a:buNone/>
-            </a:pPr>
-            <a:r>
-              <a:rPr lang="en-US" sz="900" dirty="0">
-                <a:solidFill>
-                  <a:srgbClr val="FFFFFF">
-                    <a:alpha val="50000"/>
-                  </a:srgbClr>
-                </a:solidFill>
-                <a:latin typeface="Avenir" pitchFamily="34" charset="0"/>
-                <a:ea typeface="Avenir" pitchFamily="34" charset="-122"/>
-                <a:cs typeface="Avenir" pitchFamily="34" charset="-120"/>
-              </a:rPr>
-              <a:t>7</a:t>
+              <a:t>hopeisnotafeeling.com</a:t>
             </a:r>
             <a:endParaRPr lang="en-US" sz="900" dirty="0"/>
           </a:p>
@@ -12290,7 +11915,7 @@
                 <a:ea typeface="Avenir" pitchFamily="34" charset="-122"/>
                 <a:cs typeface="Avenir" pitchFamily="34" charset="-120"/>
               </a:rPr>
-              <a:t>The inner critic at 5am</a:t>
+              <a:t>The inner critic at 5 am</a:t>
             </a:r>
             <a:endParaRPr lang="en-US" sz="1200" dirty="0"/>
           </a:p>
@@ -12537,8 +12162,8 @@
         </p:nvSpPr>
         <p:spPr>
           <a:xfrm>
-            <a:off x="3429000" y="2057400"/>
-            <a:ext cx="2468880" cy="2468880"/>
+            <a:off x="3429000" y="2103120"/>
+            <a:ext cx="2468880" cy="2603146"/>
           </a:xfrm>
           <a:prstGeom prst="rect">
             <a:avLst/>
@@ -12652,7 +12277,26 @@
               </a:rPr>
               <a:t>The weight we carry daily</a:t>
             </a:r>
-            <a:endParaRPr lang="en-US" sz="1200" dirty="0"/>
+          </a:p>
+          <a:p>
+            <a:pPr marL="342900" indent="-342900">
+              <a:spcAft>
+                <a:spcPts val="700"/>
+              </a:spcAft>
+              <a:buSzPct val="100000"/>
+              <a:buChar char="•"/>
+            </a:pPr>
+            <a:r>
+              <a:rPr lang="en-US" sz="1200" dirty="0">
+                <a:solidFill>
+                  <a:srgbClr val="D4DEED"/>
+                </a:solidFill>
+                <a:latin typeface="Avenir" pitchFamily="34" charset="0"/>
+                <a:ea typeface="Avenir" pitchFamily="34" charset="-122"/>
+                <a:cs typeface="Avenir" pitchFamily="34" charset="-120"/>
+              </a:rPr>
+              <a:t>The chaotic world around us</a:t>
+            </a:r>
           </a:p>
         </p:txBody>
       </p:sp>
@@ -12953,11 +12597,11 @@
           <a:bodyPr wrap="square" rtlCol="0" anchor="ctr"/>
           <a:lstStyle/>
           <a:p>
-            <a:pPr marL="0" indent="0" algn="r">
-              <a:buNone/>
-            </a:pPr>
-            <a:r>
-              <a:rPr lang="en-US" sz="900" dirty="0">
+            <a:pPr marL="0" indent="0">
+              <a:buNone/>
+            </a:pPr>
+            <a:r>
+              <a:rPr lang="en-US" sz="900" dirty="0" err="1">
                 <a:solidFill>
                   <a:srgbClr val="4A5568"/>
                 </a:solidFill>
@@ -12965,7 +12609,7 @@
                 <a:ea typeface="Avenir" pitchFamily="34" charset="-122"/>
                 <a:cs typeface="Avenir" pitchFamily="34" charset="-120"/>
               </a:rPr>
-              <a:t>agilebestself.com</a:t>
+              <a:t>hopeisnotafeeling.com</a:t>
             </a:r>
             <a:endParaRPr lang="en-US" sz="900" dirty="0"/>
           </a:p>
@@ -13576,7 +13220,7 @@
               <a:buNone/>
             </a:pPr>
             <a:r>
-              <a:rPr lang="en-US" sz="900" dirty="0">
+              <a:rPr lang="en-US" sz="900" dirty="0" err="1">
                 <a:solidFill>
                   <a:srgbClr val="FFFFFF">
                     <a:alpha val="50000"/>
@@ -13586,48 +13230,7 @@
                 <a:ea typeface="Avenir" pitchFamily="34" charset="-122"/>
                 <a:cs typeface="Avenir" pitchFamily="34" charset="-120"/>
               </a:rPr>
-              <a:t>agilebestself.com</a:t>
-            </a:r>
-            <a:endParaRPr lang="en-US" sz="900" dirty="0"/>
-          </a:p>
-        </p:txBody>
-      </p:sp>
-      <p:sp>
-        <p:nvSpPr>
-          <p:cNvPr id="15" name="Text 13"/>
-          <p:cNvSpPr/>
-          <p:nvPr/>
-        </p:nvSpPr>
-        <p:spPr>
-          <a:xfrm>
-            <a:off x="8503920" y="4773168"/>
-            <a:ext cx="457200" cy="228600"/>
-          </a:xfrm>
-          <a:prstGeom prst="rect">
-            <a:avLst/>
-          </a:prstGeom>
-          <a:noFill/>
-          <a:ln/>
-        </p:spPr>
-        <p:txBody>
-          <a:bodyPr wrap="square" rtlCol="0" anchor="ctr"/>
-          <a:lstStyle/>
-          <a:p>
-            <a:pPr marL="0" indent="0" algn="r">
-              <a:buNone/>
-            </a:pPr>
-            <a:r>
-              <a:rPr lang="en-US" sz="900" dirty="0">
-                <a:solidFill>
-                  <a:srgbClr val="FFFFFF">
-                    <a:alpha val="50000"/>
-                  </a:srgbClr>
-                </a:solidFill>
-                <a:latin typeface="Avenir" pitchFamily="34" charset="0"/>
-                <a:ea typeface="Avenir" pitchFamily="34" charset="-122"/>
-                <a:cs typeface="Avenir" pitchFamily="34" charset="-120"/>
-              </a:rPr>
-              <a:t>9</a:t>
+              <a:t>hopeisnotafeeling.com</a:t>
             </a:r>
             <a:endParaRPr lang="en-US" sz="900" dirty="0"/>
           </a:p>
